--- a/Lecture slides/NYT B02 - Scientific Research.pptx
+++ b/Lecture slides/NYT B02 - Scientific Research.pptx
@@ -8737,7 +8737,7 @@
             </a:pPr>
             <a:r>
               <a:rPr lang="en"/>
-              <a:t>Dirk Riehle, Univ. Erlangen</a:t>
+              <a:t>Dirk Riehle, FAU Erlangen</a:t>
             </a:r>
             <a:endParaRPr/>
           </a:p>
@@ -16144,7 +16144,7 @@
             <a:tbl>
               <a:tblPr>
                 <a:noFill/>
-                <a:tableStyleId>{7DC0C3A9-428B-47E5-9713-4549E26B376F}</a:tableStyleId>
+                <a:tableStyleId>{98E72479-A9E3-4B0E-AC78-7C7EDF1850C0}</a:tableStyleId>
               </a:tblPr>
               <a:tblGrid>
                 <a:gridCol w="2865125"/>
@@ -19771,7 +19771,7 @@
             <a:tbl>
               <a:tblPr>
                 <a:noFill/>
-                <a:tableStyleId>{7DC0C3A9-428B-47E5-9713-4549E26B376F}</a:tableStyleId>
+                <a:tableStyleId>{98E72479-A9E3-4B0E-AC78-7C7EDF1850C0}</a:tableStyleId>
               </a:tblPr>
               <a:tblGrid>
                 <a:gridCol w="1541200"/>
